--- a/docs/downloads/AAU_Research_Tracker.pptx
+++ b/docs/downloads/AAU_Research_Tracker.pptx
@@ -3174,7 +3174,7 @@
                   <a:srgbClr val="D5E8DC"/>
                 </a:solidFill>
               </a:rPr>
-              <a:t>1,338 papers · 536 authors · 169 on the faculty roster</a:t>
+              <a:t>4,245 papers · 536 authors · 161 on the faculty roster</a:t>
             </a:r>
           </a:p>
           <a:p>
@@ -3224,7 +3224,7 @@
         <p:spPr>
           <a:xfrm>
             <a:off x="640080" y="640080"/>
-            <a:ext cx="10881360" cy="6110675"/>
+            <a:ext cx="10881360" cy="6031111"/>
           </a:xfrm>
           <a:prstGeom prst="rect">
             <a:avLst/>
@@ -3266,7 +3266,7 @@
         <p:spPr>
           <a:xfrm>
             <a:off x="640080" y="640080"/>
-            <a:ext cx="10881360" cy="5238874"/>
+            <a:ext cx="10881360" cy="5159334"/>
           </a:xfrm>
           <a:prstGeom prst="rect">
             <a:avLst/>
@@ -3308,7 +3308,7 @@
         <p:spPr>
           <a:xfrm>
             <a:off x="640080" y="640080"/>
-            <a:ext cx="10881360" cy="3214717"/>
+            <a:ext cx="10881360" cy="3234999"/>
           </a:xfrm>
           <a:prstGeom prst="rect">
             <a:avLst/>
@@ -3350,7 +3350,7 @@
         <p:spPr>
           <a:xfrm>
             <a:off x="640080" y="640080"/>
-            <a:ext cx="10881360" cy="7163768"/>
+            <a:ext cx="10881360" cy="7089494"/>
           </a:xfrm>
           <a:prstGeom prst="rect">
             <a:avLst/>
@@ -3392,7 +3392,7 @@
         <p:spPr>
           <a:xfrm>
             <a:off x="640080" y="640080"/>
-            <a:ext cx="10881360" cy="6616569"/>
+            <a:ext cx="10881360" cy="6571996"/>
           </a:xfrm>
           <a:prstGeom prst="rect">
             <a:avLst/>

--- a/docs/downloads/AAU_Research_Tracker.pptx
+++ b/docs/downloads/AAU_Research_Tracker.pptx
@@ -3174,7 +3174,7 @@
                   <a:srgbClr val="D5E8DC"/>
                 </a:solidFill>
               </a:rPr>
-              <a:t>4,245 papers · 536 authors · 161 on the faculty roster</a:t>
+              <a:t>4,245 papers · 514 authors · 139 on the faculty roster</a:t>
             </a:r>
           </a:p>
           <a:p>
@@ -3350,7 +3350,7 @@
         <p:spPr>
           <a:xfrm>
             <a:off x="640080" y="640080"/>
-            <a:ext cx="10881360" cy="7089494"/>
+            <a:ext cx="10881360" cy="6970124"/>
           </a:xfrm>
           <a:prstGeom prst="rect">
             <a:avLst/>

--- a/docs/downloads/AAU_Research_Tracker.pptx
+++ b/docs/downloads/AAU_Research_Tracker.pptx
@@ -3174,7 +3174,7 @@
                   <a:srgbClr val="D5E8DC"/>
                 </a:solidFill>
               </a:rPr>
-              <a:t>4,245 papers · 514 authors · 139 on the faculty roster</a:t>
+              <a:t>4,245 papers · 545 authors · 170 on the faculty roster</a:t>
             </a:r>
           </a:p>
           <a:p>

--- a/docs/downloads/AAU_Research_Tracker.pptx
+++ b/docs/downloads/AAU_Research_Tracker.pptx
@@ -3174,7 +3174,7 @@
                   <a:srgbClr val="D5E8DC"/>
                 </a:solidFill>
               </a:rPr>
-              <a:t>4,245 papers · 545 authors · 170 on the faculty roster</a:t>
+              <a:t>4,245 papers · 545 authors · 171 on the faculty roster</a:t>
             </a:r>
           </a:p>
           <a:p>
@@ -3184,7 +3184,7 @@
                   <a:srgbClr val="B9D9C6"/>
                 </a:solidFill>
               </a:rPr>
-              <a:t>Nothing is counted unless the paper itself prints an AAU address. Generated 2026-08-27.</a:t>
+              <a:t>Nothing is counted unless the paper itself prints an AAU address. Generated 2026-08-28.</a:t>
             </a:r>
           </a:p>
         </p:txBody>

--- a/docs/downloads/AAU_Research_Tracker.pptx
+++ b/docs/downloads/AAU_Research_Tracker.pptx
@@ -3174,7 +3174,7 @@
                   <a:srgbClr val="D5E8DC"/>
                 </a:solidFill>
               </a:rPr>
-              <a:t>4,245 papers · 545 authors · 171 on the faculty roster</a:t>
+              <a:t>4,245 papers · 555 authors · 181 on the faculty roster</a:t>
             </a:r>
           </a:p>
           <a:p>

--- a/docs/downloads/AAU_Research_Tracker.pptx
+++ b/docs/downloads/AAU_Research_Tracker.pptx
@@ -3174,7 +3174,7 @@
                   <a:srgbClr val="D5E8DC"/>
                 </a:solidFill>
               </a:rPr>
-              <a:t>4,245 papers · 555 authors · 181 on the faculty roster</a:t>
+              <a:t>3,204 papers · 556 authors · 182 on the faculty roster</a:t>
             </a:r>
           </a:p>
           <a:p>

--- a/docs/downloads/AAU_Research_Tracker.pptx
+++ b/docs/downloads/AAU_Research_Tracker.pptx
@@ -3174,7 +3174,7 @@
                   <a:srgbClr val="D5E8DC"/>
                 </a:solidFill>
               </a:rPr>
-              <a:t>3,204 papers · 556 authors · 182 on the faculty roster</a:t>
+              <a:t>4,285 papers · 556 authors · 182 on the faculty roster</a:t>
             </a:r>
           </a:p>
           <a:p>

--- a/docs/downloads/AAU_Research_Tracker.pptx
+++ b/docs/downloads/AAU_Research_Tracker.pptx
@@ -3174,7 +3174,7 @@
                   <a:srgbClr val="D5E8DC"/>
                 </a:solidFill>
               </a:rPr>
-              <a:t>4,285 papers · 556 authors · 182 on the faculty roster</a:t>
+              <a:t>4,285 papers · 557 authors · 183 on the faculty roster</a:t>
             </a:r>
           </a:p>
           <a:p>

--- a/docs/downloads/AAU_Research_Tracker.pptx
+++ b/docs/downloads/AAU_Research_Tracker.pptx
@@ -3174,7 +3174,7 @@
                   <a:srgbClr val="D5E8DC"/>
                 </a:solidFill>
               </a:rPr>
-              <a:t>4,285 papers · 557 authors · 183 on the faculty roster</a:t>
+              <a:t>2,330 papers · 548 authors · 174 on the faculty roster</a:t>
             </a:r>
           </a:p>
           <a:p>
@@ -3184,7 +3184,7 @@
                   <a:srgbClr val="B9D9C6"/>
                 </a:solidFill>
               </a:rPr>
-              <a:t>Nothing is counted unless the paper itself prints an AAU address. Generated 2026-08-28.</a:t>
+              <a:t>Nothing is counted unless the paper itself prints an AAU address. Generated 2026-08-29.</a:t>
             </a:r>
           </a:p>
         </p:txBody>

--- a/docs/downloads/AAU_Research_Tracker.pptx
+++ b/docs/downloads/AAU_Research_Tracker.pptx
@@ -11,6 +11,8 @@
     <p:sldId id="259" r:id="rId10"/>
     <p:sldId id="260" r:id="rId11"/>
     <p:sldId id="261" r:id="rId12"/>
+    <p:sldId id="262" r:id="rId13"/>
+    <p:sldId id="263" r:id="rId14"/>
   </p:sldIdLst>
   <p:sldSz cx="12191695" cy="6858000" type="screen4x3"/>
   <p:notesSz cx="6858000" cy="9144000"/>
@@ -3174,7 +3176,7 @@
                   <a:srgbClr val="D5E8DC"/>
                 </a:solidFill>
               </a:rPr>
-              <a:t>2,330 papers · 548 authors · 174 on the faculty roster</a:t>
+              <a:t>4,285 papers · 557 authors · 183 on the faculty roster</a:t>
             </a:r>
           </a:p>
           <a:p>
@@ -3393,6 +3395,90 @@
           <a:xfrm>
             <a:off x="640080" y="640080"/>
             <a:ext cx="10881360" cy="6571996"/>
+          </a:xfrm>
+          <a:prstGeom prst="rect">
+            <a:avLst/>
+          </a:prstGeom>
+        </p:spPr>
+      </p:pic>
+    </p:spTree>
+  </p:cSld>
+  <p:clrMapOvr>
+    <a:masterClrMapping/>
+  </p:clrMapOvr>
+</p:sld>
+</file>
+
+<file path=ppt/slides/slide7.xml><?xml version="1.0" encoding="utf-8"?>
+<p:sld xmlns:a="http://schemas.openxmlformats.org/drawingml/2006/main" xmlns:p="http://schemas.openxmlformats.org/presentationml/2006/main" xmlns:r="http://schemas.openxmlformats.org/officeDocument/2006/relationships">
+  <p:cSld>
+    <p:spTree>
+      <p:nvGrpSpPr>
+        <p:cNvPr id="1" name=""/>
+        <p:cNvGrpSpPr/>
+        <p:nvPr/>
+      </p:nvGrpSpPr>
+      <p:grpSpPr/>
+      <p:pic>
+        <p:nvPicPr>
+          <p:cNvPr id="2" name="Picture 1" descr="07_programmes_per_staff.png"/>
+          <p:cNvPicPr>
+            <a:picLocks noChangeAspect="1"/>
+          </p:cNvPicPr>
+          <p:nvPr/>
+        </p:nvPicPr>
+        <p:blipFill>
+          <a:blip r:embed="rId2"/>
+          <a:stretch>
+            <a:fillRect/>
+          </a:stretch>
+        </p:blipFill>
+        <p:spPr>
+          <a:xfrm>
+            <a:off x="640080" y="640080"/>
+            <a:ext cx="10881360" cy="7059336"/>
+          </a:xfrm>
+          <a:prstGeom prst="rect">
+            <a:avLst/>
+          </a:prstGeom>
+        </p:spPr>
+      </p:pic>
+    </p:spTree>
+  </p:cSld>
+  <p:clrMapOvr>
+    <a:masterClrMapping/>
+  </p:clrMapOvr>
+</p:sld>
+</file>
+
+<file path=ppt/slides/slide8.xml><?xml version="1.0" encoding="utf-8"?>
+<p:sld xmlns:a="http://schemas.openxmlformats.org/drawingml/2006/main" xmlns:p="http://schemas.openxmlformats.org/presentationml/2006/main" xmlns:r="http://schemas.openxmlformats.org/officeDocument/2006/relationships">
+  <p:cSld>
+    <p:spTree>
+      <p:nvGrpSpPr>
+        <p:cNvPr id="1" name=""/>
+        <p:cNvGrpSpPr/>
+        <p:nvPr/>
+      </p:nvGrpSpPr>
+      <p:grpSpPr/>
+      <p:pic>
+        <p:nvPicPr>
+          <p:cNvPr id="2" name="Picture 1" descr="08_impact_against_volume.png"/>
+          <p:cNvPicPr>
+            <a:picLocks noChangeAspect="1"/>
+          </p:cNvPicPr>
+          <p:nvPr/>
+        </p:nvPicPr>
+        <p:blipFill>
+          <a:blip r:embed="rId2"/>
+          <a:stretch>
+            <a:fillRect/>
+          </a:stretch>
+        </p:blipFill>
+        <p:spPr>
+          <a:xfrm>
+            <a:off x="640080" y="640080"/>
+            <a:ext cx="10881360" cy="7206410"/>
           </a:xfrm>
           <a:prstGeom prst="rect">
             <a:avLst/>

--- a/docs/downloads/AAU_Research_Tracker.pptx
+++ b/docs/downloads/AAU_Research_Tracker.pptx
@@ -13,6 +13,10 @@
     <p:sldId id="261" r:id="rId12"/>
     <p:sldId id="262" r:id="rId13"/>
     <p:sldId id="263" r:id="rId14"/>
+    <p:sldId id="264" r:id="rId15"/>
+    <p:sldId id="265" r:id="rId16"/>
+    <p:sldId id="266" r:id="rId17"/>
+    <p:sldId id="267" r:id="rId18"/>
   </p:sldIdLst>
   <p:sldSz cx="12191695" cy="6858000" type="screen4x3"/>
   <p:notesSz cx="6858000" cy="9144000"/>
@@ -3199,6 +3203,132 @@
 </p:sld>
 </file>
 
+<file path=ppt/slides/slide10.xml><?xml version="1.0" encoding="utf-8"?>
+<p:sld xmlns:a="http://schemas.openxmlformats.org/drawingml/2006/main" xmlns:p="http://schemas.openxmlformats.org/presentationml/2006/main" xmlns:r="http://schemas.openxmlformats.org/officeDocument/2006/relationships">
+  <p:cSld>
+    <p:spTree>
+      <p:nvGrpSpPr>
+        <p:cNvPr id="1" name=""/>
+        <p:cNvGrpSpPr/>
+        <p:nvPr/>
+      </p:nvGrpSpPr>
+      <p:grpSpPr/>
+      <p:pic>
+        <p:nvPicPr>
+          <p:cNvPr id="2" name="Picture 1" descr="09_partner_institutions.png"/>
+          <p:cNvPicPr>
+            <a:picLocks noChangeAspect="1"/>
+          </p:cNvPicPr>
+          <p:nvPr/>
+        </p:nvPicPr>
+        <p:blipFill>
+          <a:blip r:embed="rId2"/>
+          <a:stretch>
+            <a:fillRect/>
+          </a:stretch>
+        </p:blipFill>
+        <p:spPr>
+          <a:xfrm>
+            <a:off x="640080" y="640080"/>
+            <a:ext cx="10881360" cy="6754405"/>
+          </a:xfrm>
+          <a:prstGeom prst="rect">
+            <a:avLst/>
+          </a:prstGeom>
+        </p:spPr>
+      </p:pic>
+    </p:spTree>
+  </p:cSld>
+  <p:clrMapOvr>
+    <a:masterClrMapping/>
+  </p:clrMapOvr>
+</p:sld>
+</file>
+
+<file path=ppt/slides/slide11.xml><?xml version="1.0" encoding="utf-8"?>
+<p:sld xmlns:a="http://schemas.openxmlformats.org/drawingml/2006/main" xmlns:p="http://schemas.openxmlformats.org/presentationml/2006/main" xmlns:r="http://schemas.openxmlformats.org/officeDocument/2006/relationships">
+  <p:cSld>
+    <p:spTree>
+      <p:nvGrpSpPr>
+        <p:cNvPr id="1" name=""/>
+        <p:cNvGrpSpPr/>
+        <p:nvPr/>
+      </p:nvGrpSpPr>
+      <p:grpSpPr/>
+      <p:pic>
+        <p:nvPicPr>
+          <p:cNvPr id="2" name="Picture 1" descr="10_partner_countries.png"/>
+          <p:cNvPicPr>
+            <a:picLocks noChangeAspect="1"/>
+          </p:cNvPicPr>
+          <p:nvPr/>
+        </p:nvPicPr>
+        <p:blipFill>
+          <a:blip r:embed="rId2"/>
+          <a:stretch>
+            <a:fillRect/>
+          </a:stretch>
+        </p:blipFill>
+        <p:spPr>
+          <a:xfrm>
+            <a:off x="640080" y="640080"/>
+            <a:ext cx="10881360" cy="7172383"/>
+          </a:xfrm>
+          <a:prstGeom prst="rect">
+            <a:avLst/>
+          </a:prstGeom>
+        </p:spPr>
+      </p:pic>
+    </p:spTree>
+  </p:cSld>
+  <p:clrMapOvr>
+    <a:masterClrMapping/>
+  </p:clrMapOvr>
+</p:sld>
+</file>
+
+<file path=ppt/slides/slide12.xml><?xml version="1.0" encoding="utf-8"?>
+<p:sld xmlns:a="http://schemas.openxmlformats.org/drawingml/2006/main" xmlns:p="http://schemas.openxmlformats.org/presentationml/2006/main" xmlns:r="http://schemas.openxmlformats.org/officeDocument/2006/relationships">
+  <p:cSld>
+    <p:spTree>
+      <p:nvGrpSpPr>
+        <p:cNvPr id="1" name=""/>
+        <p:cNvGrpSpPr/>
+        <p:nvPr/>
+      </p:nvGrpSpPr>
+      <p:grpSpPr/>
+      <p:pic>
+        <p:nvPicPr>
+          <p:cNvPr id="2" name="Picture 1" descr="11_citation_concentration.png"/>
+          <p:cNvPicPr>
+            <a:picLocks noChangeAspect="1"/>
+          </p:cNvPicPr>
+          <p:nvPr/>
+        </p:nvPicPr>
+        <p:blipFill>
+          <a:blip r:embed="rId2"/>
+          <a:stretch>
+            <a:fillRect/>
+          </a:stretch>
+        </p:blipFill>
+        <p:spPr>
+          <a:xfrm>
+            <a:off x="640080" y="640080"/>
+            <a:ext cx="10881360" cy="6326192"/>
+          </a:xfrm>
+          <a:prstGeom prst="rect">
+            <a:avLst/>
+          </a:prstGeom>
+        </p:spPr>
+      </p:pic>
+    </p:spTree>
+  </p:cSld>
+  <p:clrMapOvr>
+    <a:masterClrMapping/>
+  </p:clrMapOvr>
+</p:sld>
+</file>
+
 <file path=ppt/slides/slide2.xml><?xml version="1.0" encoding="utf-8"?>
 <p:sld xmlns:a="http://schemas.openxmlformats.org/drawingml/2006/main" xmlns:p="http://schemas.openxmlformats.org/presentationml/2006/main" xmlns:r="http://schemas.openxmlformats.org/officeDocument/2006/relationships">
   <p:cSld>
@@ -3421,6 +3551,48 @@
       <p:grpSpPr/>
       <p:pic>
         <p:nvPicPr>
+          <p:cNvPr id="2" name="Picture 1" descr="06_papers_per_year.png"/>
+          <p:cNvPicPr>
+            <a:picLocks noChangeAspect="1"/>
+          </p:cNvPicPr>
+          <p:nvPr/>
+        </p:nvPicPr>
+        <p:blipFill>
+          <a:blip r:embed="rId2"/>
+          <a:stretch>
+            <a:fillRect/>
+          </a:stretch>
+        </p:blipFill>
+        <p:spPr>
+          <a:xfrm>
+            <a:off x="640080" y="640080"/>
+            <a:ext cx="10881360" cy="7388462"/>
+          </a:xfrm>
+          <a:prstGeom prst="rect">
+            <a:avLst/>
+          </a:prstGeom>
+        </p:spPr>
+      </p:pic>
+    </p:spTree>
+  </p:cSld>
+  <p:clrMapOvr>
+    <a:masterClrMapping/>
+  </p:clrMapOvr>
+</p:sld>
+</file>
+
+<file path=ppt/slides/slide8.xml><?xml version="1.0" encoding="utf-8"?>
+<p:sld xmlns:a="http://schemas.openxmlformats.org/drawingml/2006/main" xmlns:p="http://schemas.openxmlformats.org/presentationml/2006/main" xmlns:r="http://schemas.openxmlformats.org/officeDocument/2006/relationships">
+  <p:cSld>
+    <p:spTree>
+      <p:nvGrpSpPr>
+        <p:cNvPr id="1" name=""/>
+        <p:cNvGrpSpPr/>
+        <p:nvPr/>
+      </p:nvGrpSpPr>
+      <p:grpSpPr/>
+      <p:pic>
+        <p:nvPicPr>
           <p:cNvPr id="2" name="Picture 1" descr="07_programmes_per_staff.png"/>
           <p:cNvPicPr>
             <a:picLocks noChangeAspect="1"/>
@@ -3451,7 +3623,7 @@
 </p:sld>
 </file>
 
-<file path=ppt/slides/slide8.xml><?xml version="1.0" encoding="utf-8"?>
+<file path=ppt/slides/slide9.xml><?xml version="1.0" encoding="utf-8"?>
 <p:sld xmlns:a="http://schemas.openxmlformats.org/drawingml/2006/main" xmlns:p="http://schemas.openxmlformats.org/presentationml/2006/main" xmlns:r="http://schemas.openxmlformats.org/officeDocument/2006/relationships">
   <p:cSld>
     <p:spTree>

--- a/docs/downloads/AAU_Research_Tracker.pptx
+++ b/docs/downloads/AAU_Research_Tracker.pptx
@@ -3180,7 +3180,7 @@
                   <a:srgbClr val="D5E8DC"/>
                 </a:solidFill>
               </a:rPr>
-              <a:t>4,285 papers · 557 authors · 183 on the faculty roster</a:t>
+              <a:t>522 papers · 555 authors · 181 on the faculty roster</a:t>
             </a:r>
           </a:p>
           <a:p>
@@ -3230,7 +3230,7 @@
         <p:spPr>
           <a:xfrm>
             <a:off x="640080" y="640080"/>
-            <a:ext cx="10881360" cy="6754405"/>
+            <a:ext cx="10881360" cy="6850479"/>
           </a:xfrm>
           <a:prstGeom prst="rect">
             <a:avLst/>
@@ -3482,7 +3482,7 @@
         <p:spPr>
           <a:xfrm>
             <a:off x="640080" y="640080"/>
-            <a:ext cx="10881360" cy="6970124"/>
+            <a:ext cx="10881360" cy="6709789"/>
           </a:xfrm>
           <a:prstGeom prst="rect">
             <a:avLst/>
@@ -3566,7 +3566,7 @@
         <p:spPr>
           <a:xfrm>
             <a:off x="640080" y="640080"/>
-            <a:ext cx="10881360" cy="7388462"/>
+            <a:ext cx="10881360" cy="7459073"/>
           </a:xfrm>
           <a:prstGeom prst="rect">
             <a:avLst/>

--- a/docs/downloads/AAU_Research_Tracker.pptx
+++ b/docs/downloads/AAU_Research_Tracker.pptx
@@ -3180,7 +3180,7 @@
                   <a:srgbClr val="D5E8DC"/>
                 </a:solidFill>
               </a:rPr>
-              <a:t>522 papers · 555 authors · 181 on the faculty roster</a:t>
+              <a:t>1,338 papers · 558 authors · 184 on the faculty roster</a:t>
             </a:r>
           </a:p>
           <a:p>
@@ -3190,7 +3190,7 @@
                   <a:srgbClr val="B9D9C6"/>
                 </a:solidFill>
               </a:rPr>
-              <a:t>Nothing is counted unless the paper itself prints an AAU address. Generated 2026-08-29.</a:t>
+              <a:t>Nothing is counted unless the paper itself prints an AAU address. Generated 2026-08-31.</a:t>
             </a:r>
           </a:p>
         </p:txBody>
@@ -3230,7 +3230,7 @@
         <p:spPr>
           <a:xfrm>
             <a:off x="640080" y="640080"/>
-            <a:ext cx="10881360" cy="6850479"/>
+            <a:ext cx="10881360" cy="6754405"/>
           </a:xfrm>
           <a:prstGeom prst="rect">
             <a:avLst/>
@@ -3482,7 +3482,7 @@
         <p:spPr>
           <a:xfrm>
             <a:off x="640080" y="640080"/>
-            <a:ext cx="10881360" cy="6709789"/>
+            <a:ext cx="10881360" cy="7089494"/>
           </a:xfrm>
           <a:prstGeom prst="rect">
             <a:avLst/>

--- a/docs/downloads/AAU_Research_Tracker.pptx
+++ b/docs/downloads/AAU_Research_Tracker.pptx
@@ -3190,7 +3190,7 @@
                   <a:srgbClr val="B9D9C6"/>
                 </a:solidFill>
               </a:rPr>
-              <a:t>Nothing is counted unless the paper itself prints an AAU address. Generated 2026-08-31.</a:t>
+              <a:t>Nothing is counted unless the paper itself prints an AAU address. Generated 2026-09-07.</a:t>
             </a:r>
           </a:p>
         </p:txBody>
